--- a/docs/QNA-Auth-Poster.pptx
+++ b/docs/QNA-Auth-Poster.pptx
@@ -243,7 +243,7 @@
           <a:p>
             <a:fld id="{8453E2C6-8CDE-4FA4-9434-0173729C9153}" type="datetimeFigureOut">
               <a:rPr lang="en-IN" smtClean="0"/>
-              <a:t>27-04-2026</a:t>
+              <a:t>28-04-2026</a:t>
             </a:fld>
             <a:endParaRPr lang="en-IN" dirty="0"/>
           </a:p>
@@ -413,7 +413,7 @@
           <a:p>
             <a:fld id="{8453E2C6-8CDE-4FA4-9434-0173729C9153}" type="datetimeFigureOut">
               <a:rPr lang="en-IN" smtClean="0"/>
-              <a:t>27-04-2026</a:t>
+              <a:t>28-04-2026</a:t>
             </a:fld>
             <a:endParaRPr lang="en-IN" dirty="0"/>
           </a:p>
@@ -593,7 +593,7 @@
           <a:p>
             <a:fld id="{8453E2C6-8CDE-4FA4-9434-0173729C9153}" type="datetimeFigureOut">
               <a:rPr lang="en-IN" smtClean="0"/>
-              <a:t>27-04-2026</a:t>
+              <a:t>28-04-2026</a:t>
             </a:fld>
             <a:endParaRPr lang="en-IN" dirty="0"/>
           </a:p>
@@ -763,7 +763,7 @@
           <a:p>
             <a:fld id="{8453E2C6-8CDE-4FA4-9434-0173729C9153}" type="datetimeFigureOut">
               <a:rPr lang="en-IN" smtClean="0"/>
-              <a:t>27-04-2026</a:t>
+              <a:t>28-04-2026</a:t>
             </a:fld>
             <a:endParaRPr lang="en-IN" dirty="0"/>
           </a:p>
@@ -1007,7 +1007,7 @@
           <a:p>
             <a:fld id="{8453E2C6-8CDE-4FA4-9434-0173729C9153}" type="datetimeFigureOut">
               <a:rPr lang="en-IN" smtClean="0"/>
-              <a:t>27-04-2026</a:t>
+              <a:t>28-04-2026</a:t>
             </a:fld>
             <a:endParaRPr lang="en-IN" dirty="0"/>
           </a:p>
@@ -1239,7 +1239,7 @@
           <a:p>
             <a:fld id="{8453E2C6-8CDE-4FA4-9434-0173729C9153}" type="datetimeFigureOut">
               <a:rPr lang="en-IN" smtClean="0"/>
-              <a:t>27-04-2026</a:t>
+              <a:t>28-04-2026</a:t>
             </a:fld>
             <a:endParaRPr lang="en-IN" dirty="0"/>
           </a:p>
@@ -1606,7 +1606,7 @@
           <a:p>
             <a:fld id="{8453E2C6-8CDE-4FA4-9434-0173729C9153}" type="datetimeFigureOut">
               <a:rPr lang="en-IN" smtClean="0"/>
-              <a:t>27-04-2026</a:t>
+              <a:t>28-04-2026</a:t>
             </a:fld>
             <a:endParaRPr lang="en-IN" dirty="0"/>
           </a:p>
@@ -1724,7 +1724,7 @@
           <a:p>
             <a:fld id="{8453E2C6-8CDE-4FA4-9434-0173729C9153}" type="datetimeFigureOut">
               <a:rPr lang="en-IN" smtClean="0"/>
-              <a:t>27-04-2026</a:t>
+              <a:t>28-04-2026</a:t>
             </a:fld>
             <a:endParaRPr lang="en-IN" dirty="0"/>
           </a:p>
@@ -1819,7 +1819,7 @@
           <a:p>
             <a:fld id="{8453E2C6-8CDE-4FA4-9434-0173729C9153}" type="datetimeFigureOut">
               <a:rPr lang="en-IN" smtClean="0"/>
-              <a:t>27-04-2026</a:t>
+              <a:t>28-04-2026</a:t>
             </a:fld>
             <a:endParaRPr lang="en-IN" dirty="0"/>
           </a:p>
@@ -2096,7 +2096,7 @@
           <a:p>
             <a:fld id="{8453E2C6-8CDE-4FA4-9434-0173729C9153}" type="datetimeFigureOut">
               <a:rPr lang="en-IN" smtClean="0"/>
-              <a:t>27-04-2026</a:t>
+              <a:t>28-04-2026</a:t>
             </a:fld>
             <a:endParaRPr lang="en-IN" dirty="0"/>
           </a:p>
@@ -2352,7 +2352,7 @@
           <a:p>
             <a:fld id="{8453E2C6-8CDE-4FA4-9434-0173729C9153}" type="datetimeFigureOut">
               <a:rPr lang="en-IN" smtClean="0"/>
-              <a:t>27-04-2026</a:t>
+              <a:t>28-04-2026</a:t>
             </a:fld>
             <a:endParaRPr lang="en-IN" dirty="0"/>
           </a:p>
@@ -2565,7 +2565,7 @@
           <a:p>
             <a:fld id="{8453E2C6-8CDE-4FA4-9434-0173729C9153}" type="datetimeFigureOut">
               <a:rPr lang="en-IN" smtClean="0"/>
-              <a:t>27-04-2026</a:t>
+              <a:t>28-04-2026</a:t>
             </a:fld>
             <a:endParaRPr lang="en-IN" dirty="0"/>
           </a:p>
@@ -4334,7 +4334,7 @@
         <p:spPr>
           <a:xfrm>
             <a:off x="10716362" y="25350564"/>
-            <a:ext cx="10296729" cy="4154984"/>
+            <a:ext cx="10296729" cy="3231654"/>
           </a:xfrm>
           <a:prstGeom prst="rect">
             <a:avLst/>
@@ -4399,21 +4399,8 @@
           <a:p>
             <a:r>
               <a:rPr lang="en-US" sz="2400" b="1" dirty="0"/>
-              <a:t>Demo Video Link:</a:t>
-            </a:r>
-          </a:p>
-          <a:p>
-            <a:r>
-              <a:rPr lang="en-US" sz="2400" b="1" dirty="0"/>
-              <a:t> </a:t>
-            </a:r>
-            <a:r>
-              <a:rPr lang="en-US" sz="2400" dirty="0"/>
-              <a:t>Paste the QR code of demo video link here. Should be accessible by anyone.</a:t>
-            </a:r>
-          </a:p>
-          <a:p>
-            <a:pPr algn="ctr"/>
+              <a:t>Demo Video</a:t>
+            </a:r>
             <a:endParaRPr lang="en-US" sz="3600" dirty="0"/>
           </a:p>
         </p:txBody>
@@ -5138,6 +5125,80 @@
               <a:t>Fig. 4. Projected Metrics Dashboard for one shot training for more than 20 devices</a:t>
             </a:r>
             <a:endParaRPr lang="en-AU" sz="1800" i="1" dirty="0"/>
+          </a:p>
+        </p:txBody>
+      </p:sp>
+      <p:pic>
+        <p:nvPicPr>
+          <p:cNvPr id="9" name="Picture 8">
+            <a:extLst>
+              <a:ext uri="{FF2B5EF4-FFF2-40B4-BE49-F238E27FC236}">
+                <a16:creationId xmlns:a16="http://schemas.microsoft.com/office/drawing/2014/main" id="{53797DFB-6388-AAA7-AD37-6195EC7CCD66}"/>
+              </a:ext>
+            </a:extLst>
+          </p:cNvPr>
+          <p:cNvPicPr>
+            <a:picLocks noChangeAspect="1"/>
+          </p:cNvPicPr>
+          <p:nvPr/>
+        </p:nvPicPr>
+        <p:blipFill>
+          <a:blip r:embed="rId11" cstate="print">
+            <a:extLst>
+              <a:ext uri="{28A0092B-C50C-407E-A947-70E740481C1C}">
+                <a14:useLocalDpi xmlns:a14="http://schemas.microsoft.com/office/drawing/2010/main" val="0"/>
+              </a:ext>
+            </a:extLst>
+          </a:blip>
+          <a:stretch>
+            <a:fillRect/>
+          </a:stretch>
+        </p:blipFill>
+        <p:spPr>
+          <a:xfrm>
+            <a:off x="19361717" y="28162817"/>
+            <a:ext cx="1292798" cy="1292798"/>
+          </a:xfrm>
+          <a:prstGeom prst="rect">
+            <a:avLst/>
+          </a:prstGeom>
+        </p:spPr>
+      </p:pic>
+      <p:sp>
+        <p:nvSpPr>
+          <p:cNvPr id="16" name="TextBox 15">
+            <a:extLst>
+              <a:ext uri="{FF2B5EF4-FFF2-40B4-BE49-F238E27FC236}">
+                <a16:creationId xmlns:a16="http://schemas.microsoft.com/office/drawing/2014/main" id="{8234899A-6369-40FB-3D6F-E594EB5A7ED2}"/>
+              </a:ext>
+            </a:extLst>
+          </p:cNvPr>
+          <p:cNvSpPr txBox="1"/>
+          <p:nvPr/>
+        </p:nvSpPr>
+        <p:spPr>
+          <a:xfrm>
+            <a:off x="10716362" y="28463671"/>
+            <a:ext cx="8596255" cy="1200329"/>
+          </a:xfrm>
+          <a:prstGeom prst="rect">
+            <a:avLst/>
+          </a:prstGeom>
+          <a:noFill/>
+        </p:spPr>
+        <p:txBody>
+          <a:bodyPr wrap="square" rtlCol="0">
+            <a:spAutoFit/>
+          </a:bodyPr>
+          <a:lstStyle/>
+          <a:p>
+            <a:r>
+              <a:rPr lang="en-US" sz="2400" dirty="0"/>
+              <a:t>https://drive.google.com/file/d/1VOirTT2gYiA3i3swWXDlJlvCnzDcECba/view?usp=sharing</a:t>
+            </a:r>
+          </a:p>
+          <a:p>
+            <a:endParaRPr lang="en-IN" sz="2400" dirty="0"/>
           </a:p>
         </p:txBody>
       </p:sp>

--- a/docs/QNA-Auth-Poster.pptx
+++ b/docs/QNA-Auth-Poster.pptx
@@ -5202,6 +5202,36 @@
           </a:p>
         </p:txBody>
       </p:sp>
+      <p:pic>
+        <p:nvPicPr>
+          <p:cNvPr id="33" name="Picture 32">
+            <a:extLst>
+              <a:ext uri="{FF2B5EF4-FFF2-40B4-BE49-F238E27FC236}">
+                <a16:creationId xmlns:a16="http://schemas.microsoft.com/office/drawing/2014/main" id="{CBBDB4A2-D639-99C6-A5F9-9DDCED2D4D6A}"/>
+              </a:ext>
+            </a:extLst>
+          </p:cNvPr>
+          <p:cNvPicPr>
+            <a:picLocks noChangeAspect="1"/>
+          </p:cNvPicPr>
+          <p:nvPr/>
+        </p:nvPicPr>
+        <p:blipFill>
+          <a:blip r:embed="rId12"/>
+          <a:stretch>
+            <a:fillRect/>
+          </a:stretch>
+        </p:blipFill>
+        <p:spPr>
+          <a:xfrm>
+            <a:off x="7133764" y="27311799"/>
+            <a:ext cx="3305636" cy="1952898"/>
+          </a:xfrm>
+          <a:prstGeom prst="rect">
+            <a:avLst/>
+          </a:prstGeom>
+        </p:spPr>
+      </p:pic>
     </p:spTree>
     <p:extLst>
       <p:ext uri="{BB962C8B-B14F-4D97-AF65-F5344CB8AC3E}">
